--- a/pharmacy_presentation .pptx
+++ b/pharmacy_presentation .pptx
@@ -6350,9 +6350,9 @@
           <p:nvPr/>
         </p:nvSpPr>
         <p:spPr>
-          <a:xfrm>
-            <a:off x="3749040" y="2377440"/>
-            <a:ext cx="0" cy="411480"/>
+          <a:xfrm flipH="1">
+            <a:off x="2549912" y="2377440"/>
+            <a:ext cx="1199128" cy="365760"/>
           </a:xfrm>
           <a:prstGeom prst="line">
             <a:avLst/>
@@ -6440,9 +6440,9 @@
           <p:nvPr/>
         </p:nvSpPr>
         <p:spPr>
-          <a:xfrm>
-            <a:off x="6858000" y="3383280"/>
-            <a:ext cx="0" cy="411480"/>
+          <a:xfrm flipH="1">
+            <a:off x="3977640" y="3383279"/>
+            <a:ext cx="2880360" cy="429761"/>
           </a:xfrm>
           <a:prstGeom prst="line">
             <a:avLst/>

--- a/pharmacy_presentation .pptx
+++ b/pharmacy_presentation .pptx
@@ -7704,7 +7704,29 @@
                 <a:ea typeface="Consolas" pitchFamily="34" charset="-122"/>
                 <a:cs typeface="Consolas" pitchFamily="34" charset="-120"/>
               </a:rPr>
-              <a:t>Latency = T_response − T_request          Throughput = Total Requests / Total Time</a:t>
+              <a:t>Latency = T_response − </a:t>
+            </a:r>
+            <a:r>
+              <a:rPr lang="en-US" sz="1500" b="1" dirty="0" err="1">
+                <a:solidFill>
+                  <a:srgbClr val="02C39A"/>
+                </a:solidFill>
+                <a:latin typeface="Consolas" pitchFamily="34" charset="0"/>
+                <a:ea typeface="Consolas" pitchFamily="34" charset="-122"/>
+                <a:cs typeface="Consolas" pitchFamily="34" charset="-120"/>
+              </a:rPr>
+              <a:t>T_request</a:t>
+            </a:r>
+            <a:r>
+              <a:rPr lang="en-US" sz="1500" b="1" dirty="0">
+                <a:solidFill>
+                  <a:srgbClr val="02C39A"/>
+                </a:solidFill>
+                <a:latin typeface="Consolas" pitchFamily="34" charset="0"/>
+                <a:ea typeface="Consolas" pitchFamily="34" charset="-122"/>
+                <a:cs typeface="Consolas" pitchFamily="34" charset="-120"/>
+              </a:rPr>
+              <a:t>  Throughput = Total Requests / Total elapsed Time</a:t>
             </a:r>
             <a:endParaRPr lang="en-US" sz="1500" dirty="0"/>
           </a:p>
